--- a/alia_django/apps/modeling/generated_presentations/Vaseline.pptx
+++ b/alia_django/apps/modeling/generated_presentations/Vaseline.pptx
@@ -3222,7 +3222,7 @@
               </a:defRPr>
             </a:pPr>
             <a:r>
-              <a:t>L'innovation au service de votre santé.</a:t>
+              <a:t>Vitalisez votre vie quotidienne avec Vaseline, le choix incontournable pour un corps hydraté et soulagé.</a:t>
             </a:r>
           </a:p>
         </p:txBody>
@@ -3374,7 +3374,7 @@
               </a:defRPr>
             </a:pPr>
             <a:r>
-              <a:t>Les patients souffrent souvent d'efflorescences cutanées, de sécheresse et de douleurs articulaires dues à l'absence de lubrification suffisante. Le manque d'hydratation peut entraîner une perte de la fonctionnement des tissus, conduisant à des problèmes de santé graves.</a:t>
+              <a:t>Les patients souffrent souvent d'une peau séche et irritée, entraînant des problèmes de confort et de qualité de vie. Les produits actuels ne répondent pas aux besoins réels, laissant les individus à chercher des solutions inefficaces ou dangereuses.</a:t>
             </a:r>
           </a:p>
         </p:txBody>
@@ -3522,7 +3522,7 @@
               <a:defRPr sz="1800"/>
             </a:pPr>
             <a:r>
-              <a:t>Vaseline, la crème hydratante et lubrifiante par excellence, utilise un mélange unique de composés naturels pour créer une barrière protectrice qui maintient l'humidité du corps. Notre formule exclusive permet de réhydrater les tissus, de soulager les douleurs articulaires et d'éliminer les efflorescences cutanées.</a:t>
+              <a:t>Vaseline utilise une formule unique qui combine des ingrédients naturels et des technologies avancées pour fournir un hydratant et un lubrifiant efficace. Notre crème est conçue pour nourrir la peau, soulager les irritations et améliorer la texture.</a:t>
             </a:r>
           </a:p>
         </p:txBody>
@@ -3694,19 +3694,19 @@
               <a:defRPr sz="1800"/>
             </a:pPr>
             <a:r>
-              <a:t>- Hydratation optimale : Vaseline fournit une hydratation profonde pour maintenir la santé des tissus.</a:t>
+              <a:t>- Hydratation durable : Vaseline offre une hydration longue durée qui résiste aux changements de température et d'humidité.</a:t>
             </a:r>
             <a:br/>
             <a:r>
-              <a:t>- Lubrification parfaite : Notre crème lubrifie les articulations, réduisant les douleurs et les gonflements.</a:t>
+              <a:t>- Protection contre les irritants : Notre crème protège la peau contre les irritants et les allergies, vous donnant la paix de cœur.</a:t>
             </a:r>
             <a:br/>
             <a:r>
-              <a:t>- Protection contre l'extérieur : Vaseline protège le corps contre les éléments extérieurs, comme la sécheresse et les irritants.</a:t>
+              <a:t>- Amélioration de l'apparence : Vaseline améliore la texture et la brillance de votre peau, vous laissant avec un aspect plus sain et éclatant.</a:t>
             </a:r>
             <a:br/>
             <a:r>
-              <a:t>- Sécurité pour tous : Notre produit est conçu pour être sûr à utiliser sur toutes les peaux et à tous les âges.</a:t>
+              <a:t>- Sécurité pour tous : Notre produit est conçu pour être sûr à utiliser par les personnes de tous âges et de tous niveaux de santé.</a:t>
             </a:r>
           </a:p>
         </p:txBody>
@@ -3854,7 +3854,7 @@
               <a:defRPr sz="2000"/>
             </a:pPr>
             <a:r>
-              <a:t>Vaseline est fabriquée avec des ingrédients de haute qualité, tels que le pétrole minéral et la cire d'abeille, qui sont choisis pour leur efficacité et leur sécurité. Notre forme crème est conçue pour être facile à appliquer et à absorber.</a:t>
+              <a:t>Notre crème Vaseline est fabriquée avec des ingrédients de haute qualité, tels que le cire d'abeille et l'huile de coco, pour offrir une expérience de texture riche et confortable. La forme compacte et facile à utiliser permet un usage quotidien sans effort.</a:t>
             </a:r>
           </a:p>
         </p:txBody>
@@ -4208,7 +4208,7 @@
               </a:defRPr>
             </a:pPr>
             <a:r>
-              <a:t>Rejoignez notre communauté de patients satisfaits et découvrez les bienfaits de Vaseline pour votre santé et votre bien-être. Achetez maintenant et commencez à vivre une vie plus hydratée et en bonne santé !</a:t>
+              <a:t>Rejoignez la communauté Vital et découvrez pourquoi Vaseline est le choix préféré des millions de personnes partout dans le monde. Essayer Vaseline aujourd'hui et vivez une vie plus hydratée, plus soulagée et plus belle !</a:t>
             </a:r>
           </a:p>
         </p:txBody>

--- a/alia_django/apps/modeling/generated_presentations/Vaseline.pptx
+++ b/alia_django/apps/modeling/generated_presentations/Vaseline.pptx
@@ -3222,7 +3222,7 @@
               </a:defRPr>
             </a:pPr>
             <a:r>
-              <a:t>Vitalisez votre vie quotidienne avec Vaseline, le choix incontournable pour un corps hydraté et soulagé.</a:t>
+              <a:t>Vitalisez votre vie quotidienne avec Vaseline, la crème ultime pour un corps hydraté et soulagé.</a:t>
             </a:r>
           </a:p>
         </p:txBody>
@@ -3374,7 +3374,7 @@
               </a:defRPr>
             </a:pPr>
             <a:r>
-              <a:t>Les patients souffrent souvent d'une peau séche et irritée, entraînant des problèmes de confort et de qualité de vie. Les produits actuels ne répondent pas aux besoins réels, laissant les individus à chercher des solutions inefficaces ou dangereuses.</a:t>
+              <a:t>Le besoin patient est souvent marqué par des peaux séches, irritées et sensibles. Les produits traditionnels ne suffisent pas à répondre aux besoins de l'été ensoleillé ou aux conditions climatiques extrêmes. Les patients cherchent un produit qui puisse les protéger et les hydrater sans laisser de résidus gras ou irritants.</a:t>
             </a:r>
           </a:p>
         </p:txBody>
@@ -3522,7 +3522,7 @@
               <a:defRPr sz="1800"/>
             </a:pPr>
             <a:r>
-              <a:t>Vaseline utilise une formule unique qui combine des ingrédients naturels et des technologies avancées pour fournir un hydratant et un lubrifiant efficace. Notre crème est conçue pour nourrir la peau, soulager les irritations et améliorer la texture.</a:t>
+              <a:t>Vaseline utilise une formule unique à base d'huile minérale, qui crée une barrière protectrice pour préserver l'équilibre de la peau. Cette technologie exclusive garantit un apport optimal d'humidité et de lubrification, sans compromettre la qualité de la peau.</a:t>
             </a:r>
           </a:p>
         </p:txBody>
@@ -3694,19 +3694,19 @@
               <a:defRPr sz="1800"/>
             </a:pPr>
             <a:r>
-              <a:t>- Hydratation durable : Vaseline offre une hydration longue durée qui résiste aux changements de température et d'humidité.</a:t>
+              <a:t>-   Hydratation optimale : Vaseline apporte à la peau l'air et l'humidité nécessaires pour rester équilibrée.</a:t>
             </a:r>
             <a:br/>
             <a:r>
-              <a:t>- Protection contre les irritants : Notre crème protège la peau contre les irritants et les allergies, vous donnant la paix de cœur.</a:t>
+              <a:t>-   Protection solaire : La crème protège les peaux contre les rayons UV, prévenant les brûlures et les irritations.</a:t>
             </a:r>
             <a:br/>
             <a:r>
-              <a:t>- Amélioration de l'apparence : Vaseline améliore la texture et la brillance de votre peau, vous laissant avec un aspect plus sain et éclatant.</a:t>
+              <a:t>-   Soulagement instantané : Vaseline apporte un soulagement immédiat aux peaux séches et irritées.</a:t>
             </a:r>
             <a:br/>
             <a:r>
-              <a:t>- Sécurité pour tous : Notre produit est conçu pour être sûr à utiliser par les personnes de tous âges et de tous niveaux de santé.</a:t>
+              <a:t>-   Formule sans parfum ni colorant : La crème est parfairement adaptée pour les peaux sensibles.</a:t>
             </a:r>
           </a:p>
         </p:txBody>
@@ -3854,7 +3854,7 @@
               <a:defRPr sz="2000"/>
             </a:pPr>
             <a:r>
-              <a:t>Notre crème Vaseline est fabriquée avec des ingrédients de haute qualité, tels que le cire d'abeille et l'huile de coco, pour offrir une expérience de texture riche et confortable. La forme compacte et facile à utiliser permet un usage quotidien sans effort.</a:t>
+              <a:t>La fabrication de Vaseline repose sur des processus de haute qualité, garantissant une texture douce et lissante. La forme Crème permet un apport uniforme d'huile à la peau, sans laisser de résidus gras ou irritants.</a:t>
             </a:r>
           </a:p>
         </p:txBody>
@@ -4208,7 +4208,7 @@
               </a:defRPr>
             </a:pPr>
             <a:r>
-              <a:t>Rejoignez la communauté Vital et découvrez pourquoi Vaseline est le choix préféré des millions de personnes partout dans le monde. Essayer Vaseline aujourd'hui et vivez une vie plus hydratée, plus soulagée et plus belle !</a:t>
+              <a:t>Rejoignez le mouvement Vital pour découvrir le secret de Vaseline : découvrez notre offre complète pour une vie quotidienne plus confortable et plus hydratée.</a:t>
             </a:r>
           </a:p>
         </p:txBody>

--- a/alia_django/apps/modeling/generated_presentations/Vaseline.pptx
+++ b/alia_django/apps/modeling/generated_presentations/Vaseline.pptx
@@ -3222,7 +3222,7 @@
               </a:defRPr>
             </a:pPr>
             <a:r>
-              <a:t>L'innovation au service de votre santé.</a:t>
+              <a:t>Vitalisez votre vie quotidienne avec Vaseline, la crème ultime pour un corps hydraté et soulagé.</a:t>
             </a:r>
           </a:p>
         </p:txBody>
@@ -3374,7 +3374,7 @@
               </a:defRPr>
             </a:pPr>
             <a:r>
-              <a:t>Les patients souffrent souvent d'efflorescences cutanées, de sécheresse et de douleurs articulaires dues à l'absence de lubrification suffisante. Le manque d'hydratation peut entraîner une perte de la fonctionnement des tissus, conduisant à des problèmes de santé graves.</a:t>
+              <a:t>Le besoin patient est souvent marqué par des peaux séches, irritées et sensibles. Les produits traditionnels ne suffisent pas à répondre aux besoins de l'été ensoleillé ou aux conditions climatiques extrêmes. Les patients cherchent un produit qui puisse les protéger et les hydrater sans laisser de résidus gras ou irritants.</a:t>
             </a:r>
           </a:p>
         </p:txBody>
@@ -3522,7 +3522,7 @@
               <a:defRPr sz="1800"/>
             </a:pPr>
             <a:r>
-              <a:t>Vaseline, la crème hydratante et lubrifiante par excellence, utilise un mélange unique de composés naturels pour créer une barrière protectrice qui maintient l'humidité du corps. Notre formule exclusive permet de réhydrater les tissus, de soulager les douleurs articulaires et d'éliminer les efflorescences cutanées.</a:t>
+              <a:t>Vaseline utilise une formule unique à base d'huile minérale, qui crée une barrière protectrice pour préserver l'équilibre de la peau. Cette technologie exclusive garantit un apport optimal d'humidité et de lubrification, sans compromettre la qualité de la peau.</a:t>
             </a:r>
           </a:p>
         </p:txBody>
@@ -3694,19 +3694,19 @@
               <a:defRPr sz="1800"/>
             </a:pPr>
             <a:r>
-              <a:t>- Hydratation optimale : Vaseline fournit une hydratation profonde pour maintenir la santé des tissus.</a:t>
+              <a:t>-   Hydratation optimale : Vaseline apporte à la peau l'air et l'humidité nécessaires pour rester équilibrée.</a:t>
             </a:r>
             <a:br/>
             <a:r>
-              <a:t>- Lubrification parfaite : Notre crème lubrifie les articulations, réduisant les douleurs et les gonflements.</a:t>
+              <a:t>-   Protection solaire : La crème protège les peaux contre les rayons UV, prévenant les brûlures et les irritations.</a:t>
             </a:r>
             <a:br/>
             <a:r>
-              <a:t>- Protection contre l'extérieur : Vaseline protège le corps contre les éléments extérieurs, comme la sécheresse et les irritants.</a:t>
+              <a:t>-   Soulagement instantané : Vaseline apporte un soulagement immédiat aux peaux séches et irritées.</a:t>
             </a:r>
             <a:br/>
             <a:r>
-              <a:t>- Sécurité pour tous : Notre produit est conçu pour être sûr à utiliser sur toutes les peaux et à tous les âges.</a:t>
+              <a:t>-   Formule sans parfum ni colorant : La crème est parfairement adaptée pour les peaux sensibles.</a:t>
             </a:r>
           </a:p>
         </p:txBody>
@@ -3854,7 +3854,7 @@
               <a:defRPr sz="2000"/>
             </a:pPr>
             <a:r>
-              <a:t>Vaseline est fabriquée avec des ingrédients de haute qualité, tels que le pétrole minéral et la cire d'abeille, qui sont choisis pour leur efficacité et leur sécurité. Notre forme crème est conçue pour être facile à appliquer et à absorber.</a:t>
+              <a:t>La fabrication de Vaseline repose sur des processus de haute qualité, garantissant une texture douce et lissante. La forme Crème permet un apport uniforme d'huile à la peau, sans laisser de résidus gras ou irritants.</a:t>
             </a:r>
           </a:p>
         </p:txBody>
@@ -4208,7 +4208,7 @@
               </a:defRPr>
             </a:pPr>
             <a:r>
-              <a:t>Rejoignez notre communauté de patients satisfaits et découvrez les bienfaits de Vaseline pour votre santé et votre bien-être. Achetez maintenant et commencez à vivre une vie plus hydratée et en bonne santé !</a:t>
+              <a:t>Rejoignez le mouvement Vital pour découvrir le secret de Vaseline : découvrez notre offre complète pour une vie quotidienne plus confortable et plus hydratée.</a:t>
             </a:r>
           </a:p>
         </p:txBody>

--- a/alia_django/apps/modeling/generated_presentations/Vaseline.pptx
+++ b/alia_django/apps/modeling/generated_presentations/Vaseline.pptx
@@ -3222,7 +3222,7 @@
               </a:defRPr>
             </a:pPr>
             <a:r>
-              <a:t>Vitalisez votre vie quotidienne avec Vaseline, le choix naturel pour un corps hydraté et doux.</a:t>
+              <a:t>Vital : le choix naturel pour un corps hydraté et en bonne santé.</a:t>
             </a:r>
           </a:p>
         </p:txBody>
@@ -3374,7 +3374,7 @@
               </a:defRPr>
             </a:pPr>
             <a:r>
-              <a:t>Le manque d'hydratation est une préoccupation majeure dans notre société actuelle. Les peaux sèches et irritées peuvent causer des problèmes de santé tels que la dermatite, les ecchymoses et l'apparence pâle. Les produits déshydratants sont souvent trop gras ou trop légers, ne répondant pas aux besoins réels des peaux.</a:t>
+              <a:t>Les patients souffrent souvent de peau sèche, irritée et déséquilibrée. La recherche d'un produit qui apporte à la fois l'hydratation et le lubrification est un défi quotidien. Les patients sont prêts à investir dans une solution qui leur permettra de retrouver la douceur et la flexibilité de leur peau.</a:t>
             </a:r>
           </a:p>
         </p:txBody>
@@ -3522,7 +3522,7 @@
               <a:defRPr sz="1800"/>
             </a:pPr>
             <a:r>
-              <a:t>La formule unique de Vaseline repose sur l'huile de cire de coco et d'olive, riches en acides gras essentiels qui hydratent et nourrissent les peaux. Cette combinaison naturelle permet de créer un film protecteur qui réduit la perte d'eau et maintient une peau douce et lissée.</a:t>
+              <a:t>Vaseline, créée par Vital, utilise des ingrédients naturels comme le cire d'abeille et l'huile de coco pour apporter une hydratation profonde à la peau. Son mode d'action unique permet de créer un film protecteur qui réduit l'inflammation et améliore la barrière cutanée, ce qui en fait l'option idéale pour les patients souffrant de peau sèche ou irritée.</a:t>
             </a:r>
           </a:p>
         </p:txBody>
@@ -3694,19 +3694,19 @@
               <a:defRPr sz="1800"/>
             </a:pPr>
             <a:r>
-              <a:t>1. Hydratation naturelle : Vaseline repose sur les huiles naturelles pour hydrater les peaux.</a:t>
+              <a:t>- Hydratation naturelle : Vaseline utilise des ingrédients naturels pour apporter une hydratation profonde à la peau.</a:t>
             </a:r>
             <a:br/>
             <a:r>
-              <a:t>2. Protection contre les irritations : La formule unique de Vaseline protège les peaux contre les irritants et les allergènes.</a:t>
+              <a:t>- Lubrification durable : Le produit crée un film protecteur qui réduit l'inflammation et améliore la barrière cutanée.</a:t>
             </a:r>
             <a:br/>
             <a:r>
-              <a:t>3. Douceur et lubrification : Vaseline est parfaite pour les personnes ayant des peaux sèches, grasses ou sensibles.</a:t>
+              <a:t>- Sécurité garantie : Vaseline est conçu sans parfum, sans colorant et sans allergène pour assurer une expérience de peau saine.</a:t>
             </a:r>
             <a:br/>
             <a:r>
-              <a:t>4. Sécurité sans compromis : Pas d'ingrédients artificiels ni de parabènes dans la formule.</a:t>
+              <a:t>- Résistance à l'eau : Le produit repose sur un système de lubrification unique qui permet à la peau de rester hydratée même après avoir été soumise à des activités physiques intenses.</a:t>
             </a:r>
           </a:p>
         </p:txBody>
@@ -3854,7 +3854,7 @@
               <a:defRPr sz="2000"/>
             </a:pPr>
             <a:r>
-              <a:t>La fabrication de Vaseline est menée avec une excellence technique qui garantit une qualité exceptionnelle. La forme crème permet un excellent mélange et une absorption rapide, ce qui rend Vaseline idéale pour les peaux sèches ou irritées.</a:t>
+              <a:t>Vaseline est fabriquée avec une excellence de fabrication exceptionnelle, utilisant des ingrédients naturels de haute qualité. La forme Crème permet un excellent absorbement et une distribution uniforme sur la peau, offrant ainsi une expérience de peau saine et hydratée.</a:t>
             </a:r>
           </a:p>
         </p:txBody>
@@ -4208,7 +4208,7 @@
               </a:defRPr>
             </a:pPr>
             <a:r>
-              <a:t>Découvrez la force de Vital en choisissant Vaseline comme votre partenaire de beauté quotidienne. Expérimentez son hydratant et son lubrifiant naturel pour un corps doux et lissé.</a:t>
+              <a:t>Rejoignez le mouvement Vital et découvrez l'avantage de Vaseline pour votre peau. Investissez dans votre bien-être et vos soins de peau avec notre produit naturellement hydratant et lubrifiant.</a:t>
             </a:r>
           </a:p>
         </p:txBody>

--- a/alia_django/apps/modeling/generated_presentations/Vaseline.pptx
+++ b/alia_django/apps/modeling/generated_presentations/Vaseline.pptx
@@ -3222,7 +3222,7 @@
               </a:defRPr>
             </a:pPr>
             <a:r>
-              <a:t>Vitalisez votre vie avec Vaseline, le hydratant et lubrifiant par excellence.</a:t>
+              <a:t>Développez la confiance en votre peau avec Vaseline, la crème parfaite pour un hygiène et une beauté optimale.</a:t>
             </a:r>
           </a:p>
         </p:txBody>
@@ -3374,7 +3374,7 @@
               </a:defRPr>
             </a:pPr>
             <a:r>
-              <a:t>Le manque d'hydratation et de protection peut entraîner des problèmes de peau tels que la sécheresse, les irritations et l'apparence saine. Les patients souffrent également de difficultés pour trouver un produit qui répond à leurs besoins spécifiques.</a:t>
+              <a:t>Les patients souffrent souvent d'efflorescences cutanées, de sécheresse et d'inconfort liés à des conditions climatiques extrêmes ou à une peau sensible. Ils cherchent un produit qui puisse les aider à retrouver leur hygiène et leur beauté naturelles.</a:t>
             </a:r>
           </a:p>
         </p:txBody>
@@ -3522,7 +3522,7 @@
               <a:defRPr sz="1800"/>
             </a:pPr>
             <a:r>
-              <a:t>Vaseline propose une solution unique en combinant des ingrédients naturels et scientifiquement étudiés pour fournir une hydratation profonde et une protection parfaite. Notre formule est conçue pour répondre aux besoins de tous les types de peau, sans compromis.</a:t>
+              <a:t>Vaseline utilise un mélange de beurre de karité et de cire d'abeille pour hydrater la peau, tandis que son lubrifiant unique permet une glissade silencieuse sur les doigts. Cette combinaison de propriétés naturelles et scientifiques garantit un résultat durable et sans irritation.</a:t>
             </a:r>
           </a:p>
         </p:txBody>
@@ -3694,19 +3694,19 @@
               <a:defRPr sz="1800"/>
             </a:pPr>
             <a:r>
-              <a:t>1. Qualité des ingrédients : Utilisons des ingrédients naturels et scientifiquement étudiés.</a:t>
+              <a:t>1. Hydratation optimale : Vaseline protège la peau contre la sécheresse et l'efflorescence.</a:t>
             </a:r>
             <a:br/>
             <a:r>
-              <a:t>2. Formule adaptée : Conçue pour répondre aux besoins de tous les types de peau.</a:t>
+              <a:t>2. Lubrification efficace : Le produit permet une glissade silencieuse sur les doigts, sans irritation ni brûlure.</a:t>
             </a:r>
             <a:br/>
             <a:r>
-              <a:t>3. Efficacité garantie : Résultats tangibles après l'utilisation.</a:t>
+              <a:t>3. Ingrédients naturels : Vaseline utilise des ingrédients naturels pour hydrater et nourrir la peau.</a:t>
             </a:r>
             <a:br/>
             <a:r>
-              <a:t>4. Sécurité sans compromis : Protégées par des tests rigoureux et une supervision médicale.</a:t>
+              <a:t>4. Durabilité garantie : Le produit maintient son efficacité tout au long de la journée.</a:t>
             </a:r>
           </a:p>
         </p:txBody>
@@ -3854,7 +3854,7 @@
               <a:defRPr sz="2000"/>
             </a:pPr>
             <a:r>
-              <a:t>Notre crème est fabriquée à partir de la meilleure qualité, avec un mélange unique de huiles et graisses naturelles. Notre forme Crème permet une absorption parfaite et une utilisation facile.</a:t>
+              <a:t>Vaseline est fabriquée avec une excellence de fabrication qui garantit sa qualité et sa durabilité. Sa forme crème permet une application facile et confortable sur la peau, sans creux ni bulles.</a:t>
             </a:r>
           </a:p>
         </p:txBody>
@@ -4208,7 +4208,7 @@
               </a:defRPr>
             </a:pPr>
             <a:r>
-              <a:t>Rejoignez le mouvement Vitalisant ! Découvrez la différence de Vaseline et vivez une vie plus hydratée, plus protégée.</a:t>
+              <a:t>Développez votre confiance en votre peau avec Vaseline. Découvrez l'efficacité de notre produit pour une hygiène et une beauté optimale.</a:t>
             </a:r>
           </a:p>
         </p:txBody>

--- a/alia_django/apps/modeling/generated_presentations/Vaseline.pptx
+++ b/alia_django/apps/modeling/generated_presentations/Vaseline.pptx
@@ -3222,7 +3222,7 @@
               </a:defRPr>
             </a:pPr>
             <a:r>
-              <a:t>Vitalisez votre vie quotidienne avec Vaseline, la crème ultime pour un corps hydraté et soulagé.</a:t>
+              <a:t>Développez la confiance en votre peau avec Vaseline, la crème parfaite pour un hygiène et une beauté optimale.</a:t>
             </a:r>
           </a:p>
         </p:txBody>
@@ -3374,7 +3374,7 @@
               </a:defRPr>
             </a:pPr>
             <a:r>
-              <a:t>Le besoin patient est souvent marqué par des peaux séches, irritées et sensibles. Les produits traditionnels ne suffisent pas à répondre aux besoins de l'été ensoleillé ou aux conditions climatiques extrêmes. Les patients cherchent un produit qui puisse les protéger et les hydrater sans laisser de résidus gras ou irritants.</a:t>
+              <a:t>Les patients souffrent souvent d'efflorescences cutanées, de sécheresse et d'inconfort liés à des conditions climatiques extrêmes ou à une peau sensible. Ils cherchent un produit qui puisse les aider à retrouver leur hygiène et leur beauté naturelles.</a:t>
             </a:r>
           </a:p>
         </p:txBody>
@@ -3522,7 +3522,7 @@
               <a:defRPr sz="1800"/>
             </a:pPr>
             <a:r>
-              <a:t>Vaseline utilise une formule unique à base d'huile minérale, qui crée une barrière protectrice pour préserver l'équilibre de la peau. Cette technologie exclusive garantit un apport optimal d'humidité et de lubrification, sans compromettre la qualité de la peau.</a:t>
+              <a:t>Vaseline utilise un mélange de beurre de karité et de cire d'abeille pour hydrater la peau, tandis que son lubrifiant unique permet une glissade silencieuse sur les doigts. Cette combinaison de propriétés naturelles et scientifiques garantit un résultat durable et sans irritation.</a:t>
             </a:r>
           </a:p>
         </p:txBody>
@@ -3694,19 +3694,19 @@
               <a:defRPr sz="1800"/>
             </a:pPr>
             <a:r>
-              <a:t>-   Hydratation optimale : Vaseline apporte à la peau l'air et l'humidité nécessaires pour rester équilibrée.</a:t>
+              <a:t>1. Hydratation optimale : Vaseline protège la peau contre la sécheresse et l'efflorescence.</a:t>
             </a:r>
             <a:br/>
             <a:r>
-              <a:t>-   Protection solaire : La crème protège les peaux contre les rayons UV, prévenant les brûlures et les irritations.</a:t>
+              <a:t>2. Lubrification efficace : Le produit permet une glissade silencieuse sur les doigts, sans irritation ni brûlure.</a:t>
             </a:r>
             <a:br/>
             <a:r>
-              <a:t>-   Soulagement instantané : Vaseline apporte un soulagement immédiat aux peaux séches et irritées.</a:t>
+              <a:t>3. Ingrédients naturels : Vaseline utilise des ingrédients naturels pour hydrater et nourrir la peau.</a:t>
             </a:r>
             <a:br/>
             <a:r>
-              <a:t>-   Formule sans parfum ni colorant : La crème est parfairement adaptée pour les peaux sensibles.</a:t>
+              <a:t>4. Durabilité garantie : Le produit maintient son efficacité tout au long de la journée.</a:t>
             </a:r>
           </a:p>
         </p:txBody>
@@ -3854,7 +3854,7 @@
               <a:defRPr sz="2000"/>
             </a:pPr>
             <a:r>
-              <a:t>La fabrication de Vaseline repose sur des processus de haute qualité, garantissant une texture douce et lissante. La forme Crème permet un apport uniforme d'huile à la peau, sans laisser de résidus gras ou irritants.</a:t>
+              <a:t>Vaseline est fabriquée avec une excellence de fabrication qui garantit sa qualité et sa durabilité. Sa forme crème permet une application facile et confortable sur la peau, sans creux ni bulles.</a:t>
             </a:r>
           </a:p>
         </p:txBody>
@@ -4208,7 +4208,7 @@
               </a:defRPr>
             </a:pPr>
             <a:r>
-              <a:t>Rejoignez le mouvement Vital pour découvrir le secret de Vaseline : découvrez notre offre complète pour une vie quotidienne plus confortable et plus hydratée.</a:t>
+              <a:t>Développez votre confiance en votre peau avec Vaseline. Découvrez l'efficacité de notre produit pour une hygiène et une beauté optimale.</a:t>
             </a:r>
           </a:p>
         </p:txBody>
